--- a/src/ppt-super/assets/tpl-09-venn-fusion/template.pptx
+++ b/src/ppt-super/assets/tpl-09-venn-fusion/template.pptx
@@ -3136,7 +3136,14 @@
           <a:bodyPr rtlCol="0" anchor="ctr"/>
           <a:lstStyle/>
           <a:p>
-            <a:pPr algn="ctr"/>
+            <a:pPr algn="ctr">
+              <a:spcBef>
+                <a:spcPts val="0"/>
+              </a:spcBef>
+              <a:spcAft>
+                <a:spcPts val="0"/>
+              </a:spcAft>
+            </a:pPr>
           </a:p>
         </p:txBody>
       </p:sp>
@@ -3166,14 +3173,21 @@
               <a:lnSpc>
                 <a:spcPct val="112000"/>
               </a:lnSpc>
-            </a:pPr>
-            <a:r>
-              <a:rPr sz="1400" b="1" i="0">
+              <a:spcBef>
+                <a:spcPts val="0"/>
+              </a:spcBef>
+              <a:spcAft>
+                <a:spcPts val="0"/>
+              </a:spcAft>
+            </a:pPr>
+            <a:r>
+              <a:rPr sz="1400" b="1" i="0" lang="zh-CN" altLang="zh-CN">
                 <a:solidFill>
                   <a:srgbClr val="FFFFFF"/>
                 </a:solidFill>
                 <a:latin typeface="Microsoft YaHei"/>
                 <a:ea typeface="Microsoft YaHei"/>
+                <a:cs typeface="Microsoft YaHei"/>
               </a:rPr>
               <a:t>智能体底座</a:t>
             </a:r>
@@ -3206,14 +3220,21 @@
               <a:lnSpc>
                 <a:spcPct val="112000"/>
               </a:lnSpc>
-            </a:pPr>
-            <a:r>
-              <a:rPr sz="2200" b="1" i="0">
+              <a:spcBef>
+                <a:spcPts val="0"/>
+              </a:spcBef>
+              <a:spcAft>
+                <a:spcPts val="0"/>
+              </a:spcAft>
+            </a:pPr>
+            <a:r>
+              <a:rPr sz="2200" b="1" i="0" lang="zh-CN" altLang="zh-CN">
                 <a:solidFill>
                   <a:srgbClr val="B90A0A"/>
                 </a:solidFill>
                 <a:latin typeface="Microsoft YaHei"/>
                 <a:ea typeface="Microsoft YaHei"/>
+                <a:cs typeface="Microsoft YaHei"/>
               </a:rPr>
               <a:t>算力×模型×数据三要素融合: 行业智能体落地周期 -60%</a:t>
             </a:r>
@@ -3284,14 +3305,21 @@
               <a:lnSpc>
                 <a:spcPct val="112000"/>
               </a:lnSpc>
-            </a:pPr>
-            <a:r>
-              <a:rPr sz="1300" b="1" i="0">
+              <a:spcBef>
+                <a:spcPts val="0"/>
+              </a:spcBef>
+              <a:spcAft>
+                <a:spcPts val="0"/>
+              </a:spcAft>
+            </a:pPr>
+            <a:r>
+              <a:rPr sz="1300" b="1" i="0" lang="zh-CN" altLang="zh-CN">
                 <a:solidFill>
                   <a:srgbClr val="1F4E79"/>
                 </a:solidFill>
                 <a:latin typeface="Microsoft YaHei"/>
                 <a:ea typeface="Microsoft YaHei"/>
+                <a:cs typeface="Microsoft YaHei"/>
               </a:rPr>
               <a:t>昇腾算力 × 盘古模型 × 行业数据  →  行业智能体规模复制</a:t>
             </a:r>
@@ -3342,7 +3370,14 @@
           <a:bodyPr rtlCol="0" anchor="ctr"/>
           <a:lstStyle/>
           <a:p>
-            <a:pPr algn="ctr"/>
+            <a:pPr algn="ctr">
+              <a:spcBef>
+                <a:spcPts val="0"/>
+              </a:spcBef>
+              <a:spcAft>
+                <a:spcPts val="0"/>
+              </a:spcAft>
+            </a:pPr>
           </a:p>
         </p:txBody>
       </p:sp>
@@ -3390,7 +3425,14 @@
           <a:bodyPr rtlCol="0" anchor="ctr"/>
           <a:lstStyle/>
           <a:p>
-            <a:pPr algn="ctr"/>
+            <a:pPr algn="ctr">
+              <a:spcBef>
+                <a:spcPts val="0"/>
+              </a:spcBef>
+              <a:spcAft>
+                <a:spcPts val="0"/>
+              </a:spcAft>
+            </a:pPr>
           </a:p>
         </p:txBody>
       </p:sp>
@@ -3438,7 +3480,14 @@
           <a:bodyPr rtlCol="0" anchor="ctr"/>
           <a:lstStyle/>
           <a:p>
-            <a:pPr algn="ctr"/>
+            <a:pPr algn="ctr">
+              <a:spcBef>
+                <a:spcPts val="0"/>
+              </a:spcBef>
+              <a:spcAft>
+                <a:spcPts val="0"/>
+              </a:spcAft>
+            </a:pPr>
           </a:p>
         </p:txBody>
       </p:sp>
@@ -3450,8 +3499,8 @@
         </p:nvSpPr>
         <p:spPr>
           <a:xfrm>
-            <a:off x="1143000" y="1524000"/>
-            <a:ext cx="1524000" cy="241300"/>
+            <a:off x="1143000" y="1506918"/>
+            <a:ext cx="1524000" cy="275463"/>
           </a:xfrm>
           <a:prstGeom prst="rect">
             <a:avLst/>
@@ -3468,14 +3517,21 @@
               <a:lnSpc>
                 <a:spcPct val="112000"/>
               </a:lnSpc>
-            </a:pPr>
-            <a:r>
-              <a:rPr sz="1600" b="1" i="0">
+              <a:spcBef>
+                <a:spcPts val="0"/>
+              </a:spcBef>
+              <a:spcAft>
+                <a:spcPts val="0"/>
+              </a:spcAft>
+            </a:pPr>
+            <a:r>
+              <a:rPr sz="1600" b="1" i="0" lang="zh-CN" altLang="zh-CN">
                 <a:solidFill>
                   <a:srgbClr val="2E75B6"/>
                 </a:solidFill>
                 <a:latin typeface="Microsoft YaHei"/>
                 <a:ea typeface="Microsoft YaHei"/>
+                <a:cs typeface="Microsoft YaHei"/>
               </a:rPr>
               <a:t>昇腾算力</a:t>
             </a:r>
@@ -3508,14 +3564,21 @@
               <a:lnSpc>
                 <a:spcPct val="112000"/>
               </a:lnSpc>
-            </a:pPr>
-            <a:r>
-              <a:rPr sz="1000" b="0" i="0">
+              <a:spcBef>
+                <a:spcPts val="0"/>
+              </a:spcBef>
+              <a:spcAft>
+                <a:spcPts val="0"/>
+              </a:spcAft>
+            </a:pPr>
+            <a:r>
+              <a:rPr sz="1000" b="0" i="0" lang="zh-CN" altLang="zh-CN">
                 <a:solidFill>
                   <a:srgbClr val="595959"/>
                 </a:solidFill>
                 <a:latin typeface="Microsoft YaHei"/>
                 <a:ea typeface="Microsoft YaHei"/>
+                <a:cs typeface="Microsoft YaHei"/>
               </a:rPr>
               <a:t>Atlas 900 集群</a:t>
             </a:r>
@@ -3525,14 +3588,21 @@
               <a:lnSpc>
                 <a:spcPct val="112000"/>
               </a:lnSpc>
-            </a:pPr>
-            <a:r>
-              <a:rPr sz="1000" b="0" i="0">
+              <a:spcBef>
+                <a:spcPts val="0"/>
+              </a:spcBef>
+              <a:spcAft>
+                <a:spcPts val="0"/>
+              </a:spcAft>
+            </a:pPr>
+            <a:r>
+              <a:rPr sz="1000" b="0" i="0" lang="zh-CN" altLang="zh-CN">
                 <a:solidFill>
                   <a:srgbClr val="595959"/>
                 </a:solidFill>
                 <a:latin typeface="Microsoft YaHei"/>
                 <a:ea typeface="Microsoft YaHei"/>
+                <a:cs typeface="Microsoft YaHei"/>
               </a:rPr>
               <a:t>4000P 算力池</a:t>
             </a:r>
@@ -3547,8 +3617,8 @@
         </p:nvSpPr>
         <p:spPr>
           <a:xfrm>
-            <a:off x="4572000" y="1524000"/>
-            <a:ext cx="1524000" cy="241300"/>
+            <a:off x="4572000" y="1506918"/>
+            <a:ext cx="1524000" cy="275463"/>
           </a:xfrm>
           <a:prstGeom prst="rect">
             <a:avLst/>
@@ -3565,14 +3635,21 @@
               <a:lnSpc>
                 <a:spcPct val="112000"/>
               </a:lnSpc>
-            </a:pPr>
-            <a:r>
-              <a:rPr sz="1600" b="1" i="0">
+              <a:spcBef>
+                <a:spcPts val="0"/>
+              </a:spcBef>
+              <a:spcAft>
+                <a:spcPts val="0"/>
+              </a:spcAft>
+            </a:pPr>
+            <a:r>
+              <a:rPr sz="1600" b="1" i="0" lang="zh-CN" altLang="zh-CN">
                 <a:solidFill>
                   <a:srgbClr val="00B050"/>
                 </a:solidFill>
                 <a:latin typeface="Microsoft YaHei"/>
                 <a:ea typeface="Microsoft YaHei"/>
+                <a:cs typeface="Microsoft YaHei"/>
               </a:rPr>
               <a:t>盘古大模型</a:t>
             </a:r>
@@ -3605,14 +3682,21 @@
               <a:lnSpc>
                 <a:spcPct val="112000"/>
               </a:lnSpc>
-            </a:pPr>
-            <a:r>
-              <a:rPr sz="1000" b="0" i="0">
+              <a:spcBef>
+                <a:spcPts val="0"/>
+              </a:spcBef>
+              <a:spcAft>
+                <a:spcPts val="0"/>
+              </a:spcAft>
+            </a:pPr>
+            <a:r>
+              <a:rPr sz="1000" b="0" i="0" lang="zh-CN" altLang="zh-CN">
                 <a:solidFill>
                   <a:srgbClr val="595959"/>
                 </a:solidFill>
                 <a:latin typeface="Microsoft YaHei"/>
                 <a:ea typeface="Microsoft YaHei"/>
+                <a:cs typeface="Microsoft YaHei"/>
               </a:rPr>
               <a:t>L0+L1 行业模型</a:t>
             </a:r>
@@ -3622,14 +3706,21 @@
               <a:lnSpc>
                 <a:spcPct val="112000"/>
               </a:lnSpc>
-            </a:pPr>
-            <a:r>
-              <a:rPr sz="1000" b="0" i="0">
+              <a:spcBef>
+                <a:spcPts val="0"/>
+              </a:spcBef>
+              <a:spcAft>
+                <a:spcPts val="0"/>
+              </a:spcAft>
+            </a:pPr>
+            <a:r>
+              <a:rPr sz="1000" b="0" i="0" lang="zh-CN" altLang="zh-CN">
                 <a:solidFill>
                   <a:srgbClr val="595959"/>
                 </a:solidFill>
                 <a:latin typeface="Microsoft YaHei"/>
                 <a:ea typeface="Microsoft YaHei"/>
+                <a:cs typeface="Microsoft YaHei"/>
               </a:rPr>
               <a:t>千亿参数底座</a:t>
             </a:r>
@@ -3644,8 +3735,8 @@
         </p:nvSpPr>
         <p:spPr>
           <a:xfrm>
-            <a:off x="2857500" y="5175250"/>
-            <a:ext cx="1524000" cy="241300"/>
+            <a:off x="2857500" y="5158168"/>
+            <a:ext cx="1524000" cy="275463"/>
           </a:xfrm>
           <a:prstGeom prst="rect">
             <a:avLst/>
@@ -3662,14 +3753,21 @@
               <a:lnSpc>
                 <a:spcPct val="112000"/>
               </a:lnSpc>
-            </a:pPr>
-            <a:r>
-              <a:rPr sz="1600" b="1" i="0">
+              <a:spcBef>
+                <a:spcPts val="0"/>
+              </a:spcBef>
+              <a:spcAft>
+                <a:spcPts val="0"/>
+              </a:spcAft>
+            </a:pPr>
+            <a:r>
+              <a:rPr sz="1600" b="1" i="0" lang="zh-CN" altLang="zh-CN">
                 <a:solidFill>
                   <a:srgbClr val="1F4E79"/>
                 </a:solidFill>
                 <a:latin typeface="Microsoft YaHei"/>
                 <a:ea typeface="Microsoft YaHei"/>
+                <a:cs typeface="Microsoft YaHei"/>
               </a:rPr>
               <a:t>行业数据</a:t>
             </a:r>
@@ -3702,14 +3800,21 @@
               <a:lnSpc>
                 <a:spcPct val="112000"/>
               </a:lnSpc>
-            </a:pPr>
-            <a:r>
-              <a:rPr sz="1000" b="0" i="0">
+              <a:spcBef>
+                <a:spcPts val="0"/>
+              </a:spcBef>
+              <a:spcAft>
+                <a:spcPts val="0"/>
+              </a:spcAft>
+            </a:pPr>
+            <a:r>
+              <a:rPr sz="1000" b="0" i="0" lang="zh-CN" altLang="zh-CN">
                 <a:solidFill>
                   <a:srgbClr val="595959"/>
                 </a:solidFill>
                 <a:latin typeface="Microsoft YaHei"/>
                 <a:ea typeface="Microsoft YaHei"/>
+                <a:cs typeface="Microsoft YaHei"/>
               </a:rPr>
               <a:t>数据治理平台</a:t>
             </a:r>
@@ -3719,14 +3824,21 @@
               <a:lnSpc>
                 <a:spcPct val="112000"/>
               </a:lnSpc>
-            </a:pPr>
-            <a:r>
-              <a:rPr sz="1000" b="0" i="0">
+              <a:spcBef>
+                <a:spcPts val="0"/>
+              </a:spcBef>
+              <a:spcAft>
+                <a:spcPts val="0"/>
+              </a:spcAft>
+            </a:pPr>
+            <a:r>
+              <a:rPr sz="1000" b="0" i="0" lang="zh-CN" altLang="zh-CN">
                 <a:solidFill>
                   <a:srgbClr val="595959"/>
                 </a:solidFill>
                 <a:latin typeface="Microsoft YaHei"/>
                 <a:ea typeface="Microsoft YaHei"/>
+                <a:cs typeface="Microsoft YaHei"/>
               </a:rPr>
               <a:t>高质量语料 12TB</a:t>
             </a:r>
@@ -3775,7 +3887,14 @@
           <a:bodyPr rtlCol="0" anchor="ctr"/>
           <a:lstStyle/>
           <a:p>
-            <a:pPr algn="ctr"/>
+            <a:pPr algn="ctr">
+              <a:spcBef>
+                <a:spcPts val="0"/>
+              </a:spcBef>
+              <a:spcAft>
+                <a:spcPts val="0"/>
+              </a:spcAft>
+            </a:pPr>
           </a:p>
         </p:txBody>
       </p:sp>
@@ -3805,14 +3924,21 @@
               <a:lnSpc>
                 <a:spcPct val="112000"/>
               </a:lnSpc>
-            </a:pPr>
-            <a:r>
-              <a:rPr sz="850" b="0" i="0">
+              <a:spcBef>
+                <a:spcPts val="0"/>
+              </a:spcBef>
+              <a:spcAft>
+                <a:spcPts val="0"/>
+              </a:spcAft>
+            </a:pPr>
+            <a:r>
+              <a:rPr sz="850" b="0" i="0" lang="zh-CN" altLang="zh-CN">
                 <a:solidFill>
                   <a:srgbClr val="595959"/>
                 </a:solidFill>
                 <a:latin typeface="Microsoft YaHei"/>
                 <a:ea typeface="Microsoft YaHei"/>
+                <a:cs typeface="Microsoft YaHei"/>
               </a:rPr>
               <a:t>训推一体</a:t>
             </a:r>
@@ -3822,14 +3948,21 @@
               <a:lnSpc>
                 <a:spcPct val="112000"/>
               </a:lnSpc>
-            </a:pPr>
-            <a:r>
-              <a:rPr sz="850" b="0" i="0">
+              <a:spcBef>
+                <a:spcPts val="0"/>
+              </a:spcBef>
+              <a:spcAft>
+                <a:spcPts val="0"/>
+              </a:spcAft>
+            </a:pPr>
+            <a:r>
+              <a:rPr sz="850" b="0" i="0" lang="zh-CN" altLang="zh-CN">
                 <a:solidFill>
                   <a:srgbClr val="595959"/>
                 </a:solidFill>
                 <a:latin typeface="Microsoft YaHei"/>
                 <a:ea typeface="Microsoft YaHei"/>
+                <a:cs typeface="Microsoft YaHei"/>
               </a:rPr>
               <a:t>算子加速</a:t>
             </a:r>
@@ -3878,7 +4011,14 @@
           <a:bodyPr rtlCol="0" anchor="ctr"/>
           <a:lstStyle/>
           <a:p>
-            <a:pPr algn="ctr"/>
+            <a:pPr algn="ctr">
+              <a:spcBef>
+                <a:spcPts val="0"/>
+              </a:spcBef>
+              <a:spcAft>
+                <a:spcPts val="0"/>
+              </a:spcAft>
+            </a:pPr>
           </a:p>
         </p:txBody>
       </p:sp>
@@ -3908,14 +4048,21 @@
               <a:lnSpc>
                 <a:spcPct val="112000"/>
               </a:lnSpc>
-            </a:pPr>
-            <a:r>
-              <a:rPr sz="850" b="0" i="0">
+              <a:spcBef>
+                <a:spcPts val="0"/>
+              </a:spcBef>
+              <a:spcAft>
+                <a:spcPts val="0"/>
+              </a:spcAft>
+            </a:pPr>
+            <a:r>
+              <a:rPr sz="850" b="0" i="0" lang="zh-CN" altLang="zh-CN">
                 <a:solidFill>
                   <a:srgbClr val="595959"/>
                 </a:solidFill>
                 <a:latin typeface="Microsoft YaHei"/>
                 <a:ea typeface="Microsoft YaHei"/>
+                <a:cs typeface="Microsoft YaHei"/>
               </a:rPr>
               <a:t>语料工程</a:t>
             </a:r>
@@ -3925,14 +4072,21 @@
               <a:lnSpc>
                 <a:spcPct val="112000"/>
               </a:lnSpc>
-            </a:pPr>
-            <a:r>
-              <a:rPr sz="850" b="0" i="0">
+              <a:spcBef>
+                <a:spcPts val="0"/>
+              </a:spcBef>
+              <a:spcAft>
+                <a:spcPts val="0"/>
+              </a:spcAft>
+            </a:pPr>
+            <a:r>
+              <a:rPr sz="850" b="0" i="0" lang="zh-CN" altLang="zh-CN">
                 <a:solidFill>
                   <a:srgbClr val="595959"/>
                 </a:solidFill>
                 <a:latin typeface="Microsoft YaHei"/>
                 <a:ea typeface="Microsoft YaHei"/>
+                <a:cs typeface="Microsoft YaHei"/>
               </a:rPr>
               <a:t>数据飞轮</a:t>
             </a:r>
@@ -3981,7 +4135,14 @@
           <a:bodyPr rtlCol="0" anchor="ctr"/>
           <a:lstStyle/>
           <a:p>
-            <a:pPr algn="ctr"/>
+            <a:pPr algn="ctr">
+              <a:spcBef>
+                <a:spcPts val="0"/>
+              </a:spcBef>
+              <a:spcAft>
+                <a:spcPts val="0"/>
+              </a:spcAft>
+            </a:pPr>
           </a:p>
         </p:txBody>
       </p:sp>
@@ -4011,14 +4172,21 @@
               <a:lnSpc>
                 <a:spcPct val="112000"/>
               </a:lnSpc>
-            </a:pPr>
-            <a:r>
-              <a:rPr sz="850" b="0" i="0">
+              <a:spcBef>
+                <a:spcPts val="0"/>
+              </a:spcBef>
+              <a:spcAft>
+                <a:spcPts val="0"/>
+              </a:spcAft>
+            </a:pPr>
+            <a:r>
+              <a:rPr sz="850" b="0" i="0" lang="zh-CN" altLang="zh-CN">
                 <a:solidFill>
                   <a:srgbClr val="595959"/>
                 </a:solidFill>
                 <a:latin typeface="Microsoft YaHei"/>
                 <a:ea typeface="Microsoft YaHei"/>
+                <a:cs typeface="Microsoft YaHei"/>
               </a:rPr>
               <a:t>模型微调</a:t>
             </a:r>
@@ -4028,14 +4196,21 @@
               <a:lnSpc>
                 <a:spcPct val="112000"/>
               </a:lnSpc>
-            </a:pPr>
-            <a:r>
-              <a:rPr sz="850" b="0" i="0">
+              <a:spcBef>
+                <a:spcPts val="0"/>
+              </a:spcBef>
+              <a:spcAft>
+                <a:spcPts val="0"/>
+              </a:spcAft>
+            </a:pPr>
+            <a:r>
+              <a:rPr sz="850" b="0" i="0" lang="zh-CN" altLang="zh-CN">
                 <a:solidFill>
                   <a:srgbClr val="595959"/>
                 </a:solidFill>
                 <a:latin typeface="Microsoft YaHei"/>
                 <a:ea typeface="Microsoft YaHei"/>
+                <a:cs typeface="Microsoft YaHei"/>
               </a:rPr>
               <a:t>场景适配</a:t>
             </a:r>
@@ -4084,7 +4259,14 @@
           <a:bodyPr rtlCol="0" anchor="ctr"/>
           <a:lstStyle/>
           <a:p>
-            <a:pPr algn="ctr"/>
+            <a:pPr algn="ctr">
+              <a:spcBef>
+                <a:spcPts val="0"/>
+              </a:spcBef>
+              <a:spcAft>
+                <a:spcPts val="0"/>
+              </a:spcAft>
+            </a:pPr>
           </a:p>
         </p:txBody>
       </p:sp>
@@ -4114,14 +4296,21 @@
               <a:lnSpc>
                 <a:spcPct val="112000"/>
               </a:lnSpc>
-            </a:pPr>
-            <a:r>
-              <a:rPr sz="1300" b="1" i="0">
+              <a:spcBef>
+                <a:spcPts val="0"/>
+              </a:spcBef>
+              <a:spcAft>
+                <a:spcPts val="0"/>
+              </a:spcAft>
+            </a:pPr>
+            <a:r>
+              <a:rPr sz="1300" b="1" i="0" lang="zh-CN" altLang="zh-CN">
                 <a:solidFill>
                   <a:srgbClr val="B90A0A"/>
                 </a:solidFill>
                 <a:latin typeface="Microsoft YaHei"/>
                 <a:ea typeface="Microsoft YaHei"/>
+                <a:cs typeface="Microsoft YaHei"/>
               </a:rPr>
               <a:t>行业智能体</a:t>
             </a:r>
@@ -4131,14 +4320,21 @@
               <a:lnSpc>
                 <a:spcPct val="112000"/>
               </a:lnSpc>
-            </a:pPr>
-            <a:r>
-              <a:rPr sz="1300" b="1" i="0">
+              <a:spcBef>
+                <a:spcPts val="0"/>
+              </a:spcBef>
+              <a:spcAft>
+                <a:spcPts val="0"/>
+              </a:spcAft>
+            </a:pPr>
+            <a:r>
+              <a:rPr sz="1300" b="1" i="0" lang="zh-CN" altLang="zh-CN">
                 <a:solidFill>
                   <a:srgbClr val="B90A0A"/>
                 </a:solidFill>
                 <a:latin typeface="Microsoft YaHei"/>
                 <a:ea typeface="Microsoft YaHei"/>
+                <a:cs typeface="Microsoft YaHei"/>
               </a:rPr>
               <a:t>一体化交付</a:t>
             </a:r>
@@ -4185,7 +4381,14 @@
           <a:bodyPr rtlCol="0" anchor="ctr"/>
           <a:lstStyle/>
           <a:p>
-            <a:pPr algn="ctr"/>
+            <a:pPr algn="ctr">
+              <a:spcBef>
+                <a:spcPts val="0"/>
+              </a:spcBef>
+              <a:spcAft>
+                <a:spcPts val="0"/>
+              </a:spcAft>
+            </a:pPr>
           </a:p>
         </p:txBody>
       </p:sp>
@@ -4215,14 +4418,21 @@
               <a:lnSpc>
                 <a:spcPct val="112000"/>
               </a:lnSpc>
-            </a:pPr>
-            <a:r>
-              <a:rPr sz="1150" b="1" i="0">
+              <a:spcBef>
+                <a:spcPts val="0"/>
+              </a:spcBef>
+              <a:spcAft>
+                <a:spcPts val="0"/>
+              </a:spcAft>
+            </a:pPr>
+            <a:r>
+              <a:rPr sz="1150" b="1" i="0" lang="zh-CN" altLang="zh-CN">
                 <a:solidFill>
                   <a:srgbClr val="FFFFFF"/>
                 </a:solidFill>
                 <a:latin typeface="Microsoft YaHei"/>
                 <a:ea typeface="Microsoft YaHei"/>
+                <a:cs typeface="Microsoft YaHei"/>
               </a:rPr>
               <a:t>⚡ 三要素融合 · 三位一体</a:t>
             </a:r>
@@ -4255,14 +4465,21 @@
               <a:lnSpc>
                 <a:spcPct val="112000"/>
               </a:lnSpc>
-            </a:pPr>
-            <a:r>
-              <a:rPr sz="1050" b="1" i="0">
+              <a:spcBef>
+                <a:spcPts val="0"/>
+              </a:spcBef>
+              <a:spcAft>
+                <a:spcPts val="0"/>
+              </a:spcAft>
+            </a:pPr>
+            <a:r>
+              <a:rPr sz="1050" b="1" i="0" lang="zh-CN" altLang="zh-CN">
                 <a:solidFill>
                   <a:srgbClr val="595959"/>
                 </a:solidFill>
                 <a:latin typeface="Microsoft YaHei"/>
                 <a:ea typeface="Microsoft YaHei"/>
+                <a:cs typeface="Microsoft YaHei"/>
               </a:rPr>
               <a:t>融合实施路径</a:t>
             </a:r>
@@ -4309,7 +4526,14 @@
           <a:bodyPr rtlCol="0" anchor="ctr"/>
           <a:lstStyle/>
           <a:p>
-            <a:pPr algn="ctr"/>
+            <a:pPr algn="ctr">
+              <a:spcBef>
+                <a:spcPts val="0"/>
+              </a:spcBef>
+              <a:spcAft>
+                <a:spcPts val="0"/>
+              </a:spcAft>
+            </a:pPr>
           </a:p>
         </p:txBody>
       </p:sp>
@@ -4339,14 +4563,21 @@
               <a:lnSpc>
                 <a:spcPct val="112000"/>
               </a:lnSpc>
-            </a:pPr>
-            <a:r>
-              <a:rPr sz="1050" b="1" i="0">
+              <a:spcBef>
+                <a:spcPts val="0"/>
+              </a:spcBef>
+              <a:spcAft>
+                <a:spcPts val="0"/>
+              </a:spcAft>
+            </a:pPr>
+            <a:r>
+              <a:rPr sz="1050" b="1" i="0" lang="zh-CN" altLang="zh-CN">
                 <a:solidFill>
                   <a:srgbClr val="1F4E79"/>
                 </a:solidFill>
                 <a:latin typeface="Microsoft YaHei"/>
                 <a:ea typeface="Microsoft YaHei"/>
+                <a:cs typeface="Microsoft YaHei"/>
               </a:rPr>
               <a:t>数据先行 · 语料入湖</a:t>
             </a:r>
@@ -4430,7 +4661,14 @@
           <a:bodyPr rtlCol="0" anchor="ctr"/>
           <a:lstStyle/>
           <a:p>
-            <a:pPr algn="ctr"/>
+            <a:pPr algn="ctr">
+              <a:spcBef>
+                <a:spcPts val="0"/>
+              </a:spcBef>
+              <a:spcAft>
+                <a:spcPts val="0"/>
+              </a:spcAft>
+            </a:pPr>
           </a:p>
         </p:txBody>
       </p:sp>
@@ -4460,14 +4698,21 @@
               <a:lnSpc>
                 <a:spcPct val="112000"/>
               </a:lnSpc>
-            </a:pPr>
-            <a:r>
-              <a:rPr sz="1050" b="1" i="0">
+              <a:spcBef>
+                <a:spcPts val="0"/>
+              </a:spcBef>
+              <a:spcAft>
+                <a:spcPts val="0"/>
+              </a:spcAft>
+            </a:pPr>
+            <a:r>
+              <a:rPr sz="1050" b="1" i="0" lang="zh-CN" altLang="zh-CN">
                 <a:solidFill>
                   <a:srgbClr val="1F4E79"/>
                 </a:solidFill>
                 <a:latin typeface="Microsoft YaHei"/>
                 <a:ea typeface="Microsoft YaHei"/>
+                <a:cs typeface="Microsoft YaHei"/>
               </a:rPr>
               <a:t>模型适配 · 场景微调</a:t>
             </a:r>
@@ -4551,7 +4796,14 @@
           <a:bodyPr rtlCol="0" anchor="ctr"/>
           <a:lstStyle/>
           <a:p>
-            <a:pPr algn="ctr"/>
+            <a:pPr algn="ctr">
+              <a:spcBef>
+                <a:spcPts val="0"/>
+              </a:spcBef>
+              <a:spcAft>
+                <a:spcPts val="0"/>
+              </a:spcAft>
+            </a:pPr>
           </a:p>
         </p:txBody>
       </p:sp>
@@ -4581,14 +4833,21 @@
               <a:lnSpc>
                 <a:spcPct val="112000"/>
               </a:lnSpc>
-            </a:pPr>
-            <a:r>
-              <a:rPr sz="1050" b="1" i="0">
+              <a:spcBef>
+                <a:spcPts val="0"/>
+              </a:spcBef>
+              <a:spcAft>
+                <a:spcPts val="0"/>
+              </a:spcAft>
+            </a:pPr>
+            <a:r>
+              <a:rPr sz="1050" b="1" i="0" lang="zh-CN" altLang="zh-CN">
                 <a:solidFill>
                   <a:srgbClr val="1F4E79"/>
                 </a:solidFill>
                 <a:latin typeface="Microsoft YaHei"/>
                 <a:ea typeface="Microsoft YaHei"/>
+                <a:cs typeface="Microsoft YaHei"/>
               </a:rPr>
               <a:t>算力弹性 · 训推一体</a:t>
             </a:r>
@@ -4637,7 +4896,14 @@
           <a:bodyPr rtlCol="0" anchor="ctr"/>
           <a:lstStyle/>
           <a:p>
-            <a:pPr algn="ctr"/>
+            <a:pPr algn="ctr">
+              <a:spcBef>
+                <a:spcPts val="0"/>
+              </a:spcBef>
+              <a:spcAft>
+                <a:spcPts val="0"/>
+              </a:spcAft>
+            </a:pPr>
           </a:p>
         </p:txBody>
       </p:sp>
@@ -4667,14 +4933,21 @@
               <a:lnSpc>
                 <a:spcPct val="112000"/>
               </a:lnSpc>
-            </a:pPr>
-            <a:r>
-              <a:rPr sz="1150" b="1" i="0">
+              <a:spcBef>
+                <a:spcPts val="0"/>
+              </a:spcBef>
+              <a:spcAft>
+                <a:spcPts val="0"/>
+              </a:spcAft>
+            </a:pPr>
+            <a:r>
+              <a:rPr sz="1150" b="1" i="0" lang="zh-CN" altLang="zh-CN">
                 <a:solidFill>
                   <a:srgbClr val="262626"/>
                 </a:solidFill>
                 <a:latin typeface="Microsoft YaHei"/>
                 <a:ea typeface="Microsoft YaHei"/>
+                <a:cs typeface="Microsoft YaHei"/>
               </a:rPr>
               <a:t>规模复制节奏</a:t>
             </a:r>
@@ -4707,14 +4980,21 @@
               <a:lnSpc>
                 <a:spcPct val="130000"/>
               </a:lnSpc>
-            </a:pPr>
-            <a:r>
-              <a:rPr sz="950" b="0" i="0">
+              <a:spcBef>
+                <a:spcPts val="0"/>
+              </a:spcBef>
+              <a:spcAft>
+                <a:spcPts val="0"/>
+              </a:spcAft>
+            </a:pPr>
+            <a:r>
+              <a:rPr sz="950" b="0" i="0" lang="zh-CN" altLang="zh-CN">
                 <a:solidFill>
                   <a:srgbClr val="595959"/>
                 </a:solidFill>
                 <a:latin typeface="Microsoft YaHei"/>
                 <a:ea typeface="Microsoft YaHei"/>
+                <a:cs typeface="Microsoft YaHei"/>
               </a:rPr>
               <a:t>首个场景 POC 于 8 周内完成验证, 同行业按 2 周/局点节奏快速复制, 跨行业资产复用率达 70%, 单点复制成本随规模持续摊薄。</a:t>
             </a:r>
@@ -4761,7 +5041,14 @@
           <a:bodyPr rtlCol="0" anchor="ctr"/>
           <a:lstStyle/>
           <a:p>
-            <a:pPr algn="ctr"/>
+            <a:pPr algn="ctr">
+              <a:spcBef>
+                <a:spcPts val="0"/>
+              </a:spcBef>
+              <a:spcAft>
+                <a:spcPts val="0"/>
+              </a:spcAft>
+            </a:pPr>
           </a:p>
         </p:txBody>
       </p:sp>
@@ -4805,7 +5092,14 @@
           <a:bodyPr rtlCol="0" anchor="ctr"/>
           <a:lstStyle/>
           <a:p>
-            <a:pPr algn="ctr"/>
+            <a:pPr algn="ctr">
+              <a:spcBef>
+                <a:spcPts val="0"/>
+              </a:spcBef>
+              <a:spcAft>
+                <a:spcPts val="0"/>
+              </a:spcAft>
+            </a:pPr>
           </a:p>
         </p:txBody>
       </p:sp>
@@ -4835,14 +5129,21 @@
               <a:lnSpc>
                 <a:spcPct val="112000"/>
               </a:lnSpc>
-            </a:pPr>
-            <a:r>
-              <a:rPr sz="1500" b="1" i="0">
+              <a:spcBef>
+                <a:spcPts val="0"/>
+              </a:spcBef>
+              <a:spcAft>
+                <a:spcPts val="0"/>
+              </a:spcAft>
+            </a:pPr>
+            <a:r>
+              <a:rPr sz="1500" b="1" i="0" lang="zh-CN" altLang="zh-CN">
                 <a:solidFill>
                   <a:srgbClr val="262626"/>
                 </a:solidFill>
                 <a:latin typeface="Microsoft YaHei"/>
                 <a:ea typeface="Microsoft YaHei"/>
+                <a:cs typeface="Microsoft YaHei"/>
               </a:rPr>
               <a:t>融合场景</a:t>
             </a:r>
@@ -4875,14 +5176,21 @@
               <a:lnSpc>
                 <a:spcPct val="125000"/>
               </a:lnSpc>
-            </a:pPr>
-            <a:r>
-              <a:rPr sz="1200" b="0" i="0">
+              <a:spcBef>
+                <a:spcPts val="0"/>
+              </a:spcBef>
+              <a:spcAft>
+                <a:spcPts val="0"/>
+              </a:spcAft>
+            </a:pPr>
+            <a:r>
+              <a:rPr sz="1200" b="0" i="0" lang="zh-CN" altLang="zh-CN">
                 <a:solidFill>
                   <a:srgbClr val="262626"/>
                 </a:solidFill>
                 <a:latin typeface="Microsoft YaHei"/>
                 <a:ea typeface="Microsoft YaHei"/>
+                <a:cs typeface="Microsoft YaHei"/>
               </a:rPr>
               <a:t>• 矿山: 掘进面无人巡检, 缺陷召回率 98.7%</a:t>
             </a:r>
@@ -4892,14 +5200,21 @@
               <a:lnSpc>
                 <a:spcPct val="125000"/>
               </a:lnSpc>
-            </a:pPr>
-            <a:r>
-              <a:rPr sz="1200" b="0" i="0">
+              <a:spcBef>
+                <a:spcPts val="0"/>
+              </a:spcBef>
+              <a:spcAft>
+                <a:spcPts val="0"/>
+              </a:spcAft>
+            </a:pPr>
+            <a:r>
+              <a:rPr sz="1200" b="0" i="0" lang="zh-CN" altLang="zh-CN">
                 <a:solidFill>
                   <a:srgbClr val="262626"/>
                 </a:solidFill>
                 <a:latin typeface="Microsoft YaHei"/>
                 <a:ea typeface="Microsoft YaHei"/>
+                <a:cs typeface="Microsoft YaHei"/>
               </a:rPr>
               <a:t>• 电力: 输电线路缺陷识别, 巡检效率 ×10</a:t>
             </a:r>
@@ -4909,14 +5224,21 @@
               <a:lnSpc>
                 <a:spcPct val="125000"/>
               </a:lnSpc>
-            </a:pPr>
-            <a:r>
-              <a:rPr sz="1200" b="0" i="0">
+              <a:spcBef>
+                <a:spcPts val="0"/>
+              </a:spcBef>
+              <a:spcAft>
+                <a:spcPts val="0"/>
+              </a:spcAft>
+            </a:pPr>
+            <a:r>
+              <a:rPr sz="1200" b="0" i="0" lang="zh-CN" altLang="zh-CN">
                 <a:solidFill>
                   <a:srgbClr val="262626"/>
                 </a:solidFill>
                 <a:latin typeface="Microsoft YaHei"/>
                 <a:ea typeface="Microsoft YaHei"/>
+                <a:cs typeface="Microsoft YaHei"/>
               </a:rPr>
               <a:t>• 制造: 质检智能体替代人工目检 80% 工位</a:t>
             </a:r>
@@ -4926,14 +5248,21 @@
               <a:lnSpc>
                 <a:spcPct val="125000"/>
               </a:lnSpc>
-            </a:pPr>
-            <a:r>
-              <a:rPr sz="1200" b="0" i="0">
+              <a:spcBef>
+                <a:spcPts val="0"/>
+              </a:spcBef>
+              <a:spcAft>
+                <a:spcPts val="0"/>
+              </a:spcAft>
+            </a:pPr>
+            <a:r>
+              <a:rPr sz="1200" b="0" i="0" lang="zh-CN" altLang="zh-CN">
                 <a:solidFill>
                   <a:srgbClr val="262626"/>
                 </a:solidFill>
                 <a:latin typeface="Microsoft YaHei"/>
                 <a:ea typeface="Microsoft YaHei"/>
+                <a:cs typeface="Microsoft YaHei"/>
               </a:rPr>
               <a:t>• 政务: 12345 工单智能分拨, 处置时延 -70%</a:t>
             </a:r>
@@ -4943,14 +5272,21 @@
               <a:lnSpc>
                 <a:spcPct val="125000"/>
               </a:lnSpc>
-            </a:pPr>
-            <a:r>
-              <a:rPr sz="1200" b="0" i="0">
+              <a:spcBef>
+                <a:spcPts val="0"/>
+              </a:spcBef>
+              <a:spcAft>
+                <a:spcPts val="0"/>
+              </a:spcAft>
+            </a:pPr>
+            <a:r>
+              <a:rPr sz="1200" b="0" i="0" lang="zh-CN" altLang="zh-CN">
                 <a:solidFill>
                   <a:srgbClr val="262626"/>
                 </a:solidFill>
                 <a:latin typeface="Microsoft YaHei"/>
                 <a:ea typeface="Microsoft YaHei"/>
+                <a:cs typeface="Microsoft YaHei"/>
               </a:rPr>
               <a:t>• 园区: 安防事件智能研判, 误报率 -82%</a:t>
             </a:r>
@@ -4997,7 +5333,14 @@
           <a:bodyPr rtlCol="0" anchor="ctr"/>
           <a:lstStyle/>
           <a:p>
-            <a:pPr algn="ctr"/>
+            <a:pPr algn="ctr">
+              <a:spcBef>
+                <a:spcPts val="0"/>
+              </a:spcBef>
+              <a:spcAft>
+                <a:spcPts val="0"/>
+              </a:spcAft>
+            </a:pPr>
           </a:p>
         </p:txBody>
       </p:sp>
@@ -5041,7 +5384,14 @@
           <a:bodyPr rtlCol="0" anchor="ctr"/>
           <a:lstStyle/>
           <a:p>
-            <a:pPr algn="ctr"/>
+            <a:pPr algn="ctr">
+              <a:spcBef>
+                <a:spcPts val="0"/>
+              </a:spcBef>
+              <a:spcAft>
+                <a:spcPts val="0"/>
+              </a:spcAft>
+            </a:pPr>
           </a:p>
         </p:txBody>
       </p:sp>
@@ -5071,14 +5421,21 @@
               <a:lnSpc>
                 <a:spcPct val="112000"/>
               </a:lnSpc>
-            </a:pPr>
-            <a:r>
-              <a:rPr sz="1500" b="1" i="0">
+              <a:spcBef>
+                <a:spcPts val="0"/>
+              </a:spcBef>
+              <a:spcAft>
+                <a:spcPts val="0"/>
+              </a:spcAft>
+            </a:pPr>
+            <a:r>
+              <a:rPr sz="1500" b="1" i="0" lang="zh-CN" altLang="zh-CN">
                 <a:solidFill>
                   <a:srgbClr val="262626"/>
                 </a:solidFill>
                 <a:latin typeface="Microsoft YaHei"/>
                 <a:ea typeface="Microsoft YaHei"/>
+                <a:cs typeface="Microsoft YaHei"/>
               </a:rPr>
               <a:t>融合收益</a:t>
             </a:r>
@@ -5125,7 +5482,14 @@
           <a:bodyPr rtlCol="0" anchor="ctr"/>
           <a:lstStyle/>
           <a:p>
-            <a:pPr algn="ctr"/>
+            <a:pPr algn="ctr">
+              <a:spcBef>
+                <a:spcPts val="0"/>
+              </a:spcBef>
+              <a:spcAft>
+                <a:spcPts val="0"/>
+              </a:spcAft>
+            </a:pPr>
           </a:p>
         </p:txBody>
       </p:sp>
@@ -5155,14 +5519,21 @@
               <a:lnSpc>
                 <a:spcPct val="112000"/>
               </a:lnSpc>
-            </a:pPr>
-            <a:r>
-              <a:rPr sz="1400" b="1" i="0">
+              <a:spcBef>
+                <a:spcPts val="0"/>
+              </a:spcBef>
+              <a:spcAft>
+                <a:spcPts val="0"/>
+              </a:spcAft>
+            </a:pPr>
+            <a:r>
+              <a:rPr sz="1400" b="1" i="0" lang="zh-CN" altLang="zh-CN">
                 <a:solidFill>
                   <a:srgbClr val="262626"/>
                 </a:solidFill>
                 <a:latin typeface="Microsoft YaHei"/>
                 <a:ea typeface="Microsoft YaHei"/>
+                <a:cs typeface="Microsoft YaHei"/>
               </a:rPr>
               <a:t>落地周期 -60%</a:t>
             </a:r>
@@ -5209,7 +5580,14 @@
           <a:bodyPr rtlCol="0" anchor="ctr"/>
           <a:lstStyle/>
           <a:p>
-            <a:pPr algn="ctr"/>
+            <a:pPr algn="ctr">
+              <a:spcBef>
+                <a:spcPts val="0"/>
+              </a:spcBef>
+              <a:spcAft>
+                <a:spcPts val="0"/>
+              </a:spcAft>
+            </a:pPr>
           </a:p>
         </p:txBody>
       </p:sp>
@@ -5239,14 +5617,21 @@
               <a:lnSpc>
                 <a:spcPct val="112000"/>
               </a:lnSpc>
-            </a:pPr>
-            <a:r>
-              <a:rPr sz="1400" b="1" i="0">
+              <a:spcBef>
+                <a:spcPts val="0"/>
+              </a:spcBef>
+              <a:spcAft>
+                <a:spcPts val="0"/>
+              </a:spcAft>
+            </a:pPr>
+            <a:r>
+              <a:rPr sz="1400" b="1" i="0" lang="zh-CN" altLang="zh-CN">
                 <a:solidFill>
                   <a:srgbClr val="262626"/>
                 </a:solidFill>
                 <a:latin typeface="Microsoft YaHei"/>
                 <a:ea typeface="Microsoft YaHei"/>
+                <a:cs typeface="Microsoft YaHei"/>
               </a:rPr>
               <a:t>推理成本 -45%</a:t>
             </a:r>
@@ -5295,7 +5680,14 @@
           <a:bodyPr rtlCol="0" anchor="ctr"/>
           <a:lstStyle/>
           <a:p>
-            <a:pPr algn="ctr"/>
+            <a:pPr algn="ctr">
+              <a:spcBef>
+                <a:spcPts val="0"/>
+              </a:spcBef>
+              <a:spcAft>
+                <a:spcPts val="0"/>
+              </a:spcAft>
+            </a:pPr>
           </a:p>
         </p:txBody>
       </p:sp>
@@ -5339,7 +5731,14 @@
           <a:bodyPr rtlCol="0" anchor="ctr"/>
           <a:lstStyle/>
           <a:p>
-            <a:pPr algn="ctr"/>
+            <a:pPr algn="ctr">
+              <a:spcBef>
+                <a:spcPts val="0"/>
+              </a:spcBef>
+              <a:spcAft>
+                <a:spcPts val="0"/>
+              </a:spcAft>
+            </a:pPr>
           </a:p>
         </p:txBody>
       </p:sp>
@@ -5383,7 +5782,14 @@
           <a:bodyPr rtlCol="0" anchor="ctr"/>
           <a:lstStyle/>
           <a:p>
-            <a:pPr algn="ctr"/>
+            <a:pPr algn="ctr">
+              <a:spcBef>
+                <a:spcPts val="0"/>
+              </a:spcBef>
+              <a:spcAft>
+                <a:spcPts val="0"/>
+              </a:spcAft>
+            </a:pPr>
           </a:p>
         </p:txBody>
       </p:sp>
@@ -5413,14 +5819,21 @@
               <a:lnSpc>
                 <a:spcPct val="112000"/>
               </a:lnSpc>
-            </a:pPr>
-            <a:r>
-              <a:rPr sz="1300" b="1" i="0">
+              <a:spcBef>
+                <a:spcPts val="0"/>
+              </a:spcBef>
+              <a:spcAft>
+                <a:spcPts val="0"/>
+              </a:spcAft>
+            </a:pPr>
+            <a:r>
+              <a:rPr sz="1300" b="1" i="0" lang="zh-CN" altLang="zh-CN">
                 <a:solidFill>
                   <a:srgbClr val="262626"/>
                 </a:solidFill>
                 <a:latin typeface="Microsoft YaHei"/>
                 <a:ea typeface="Microsoft YaHei"/>
+                <a:cs typeface="Microsoft YaHei"/>
               </a:rPr>
               <a:t>融合程度对比 (价值倍增)</a:t>
             </a:r>
@@ -5503,7 +5916,14 @@
           <a:bodyPr rtlCol="0" anchor="ctr"/>
           <a:lstStyle/>
           <a:p>
-            <a:pPr algn="ctr"/>
+            <a:pPr algn="ctr">
+              <a:spcBef>
+                <a:spcPts val="0"/>
+              </a:spcBef>
+              <a:spcAft>
+                <a:spcPts val="0"/>
+              </a:spcAft>
+            </a:pPr>
           </a:p>
         </p:txBody>
       </p:sp>
@@ -5515,8 +5935,8 @@
         </p:nvSpPr>
         <p:spPr>
           <a:xfrm>
-            <a:off x="8057091" y="5289126"/>
-            <a:ext cx="1121833" cy="139700"/>
+            <a:off x="8057091" y="5268742"/>
+            <a:ext cx="1121833" cy="180467"/>
           </a:xfrm>
           <a:prstGeom prst="rect">
             <a:avLst/>
@@ -5533,14 +5953,21 @@
               <a:lnSpc>
                 <a:spcPct val="112000"/>
               </a:lnSpc>
-            </a:pPr>
-            <a:r>
-              <a:rPr sz="1000" b="1" i="0">
+              <a:spcBef>
+                <a:spcPts val="0"/>
+              </a:spcBef>
+              <a:spcAft>
+                <a:spcPts val="0"/>
+              </a:spcAft>
+            </a:pPr>
+            <a:r>
+              <a:rPr sz="1000" b="1" i="0" lang="zh-CN" altLang="zh-CN">
                 <a:solidFill>
                   <a:srgbClr val="262626"/>
                 </a:solidFill>
                 <a:latin typeface="Microsoft YaHei"/>
                 <a:ea typeface="Microsoft YaHei"/>
+                <a:cs typeface="Microsoft YaHei"/>
               </a:rPr>
               <a:t>1.0×</a:t>
             </a:r>
@@ -5573,14 +6000,21 @@
               <a:lnSpc>
                 <a:spcPct val="112000"/>
               </a:lnSpc>
-            </a:pPr>
-            <a:r>
-              <a:rPr sz="950" b="0" i="0">
+              <a:spcBef>
+                <a:spcPts val="0"/>
+              </a:spcBef>
+              <a:spcAft>
+                <a:spcPts val="0"/>
+              </a:spcAft>
+            </a:pPr>
+            <a:r>
+              <a:rPr sz="950" b="0" i="0" lang="zh-CN" altLang="zh-CN">
                 <a:solidFill>
                   <a:srgbClr val="595959"/>
                 </a:solidFill>
                 <a:latin typeface="Microsoft YaHei"/>
                 <a:ea typeface="Microsoft YaHei"/>
+                <a:cs typeface="Microsoft YaHei"/>
               </a:rPr>
               <a:t>单要素</a:t>
             </a:r>
@@ -5627,7 +6061,14 @@
           <a:bodyPr rtlCol="0" anchor="ctr"/>
           <a:lstStyle/>
           <a:p>
-            <a:pPr algn="ctr"/>
+            <a:pPr algn="ctr">
+              <a:spcBef>
+                <a:spcPts val="0"/>
+              </a:spcBef>
+              <a:spcAft>
+                <a:spcPts val="0"/>
+              </a:spcAft>
+            </a:pPr>
           </a:p>
         </p:txBody>
       </p:sp>
@@ -5639,8 +6080,8 @@
         </p:nvSpPr>
         <p:spPr>
           <a:xfrm>
-            <a:off x="9178925" y="5041222"/>
-            <a:ext cx="1121833" cy="139700"/>
+            <a:off x="9178925" y="5020838"/>
+            <a:ext cx="1121833" cy="180467"/>
           </a:xfrm>
           <a:prstGeom prst="rect">
             <a:avLst/>
@@ -5657,14 +6098,21 @@
               <a:lnSpc>
                 <a:spcPct val="112000"/>
               </a:lnSpc>
-            </a:pPr>
-            <a:r>
-              <a:rPr sz="1000" b="1" i="0">
+              <a:spcBef>
+                <a:spcPts val="0"/>
+              </a:spcBef>
+              <a:spcAft>
+                <a:spcPts val="0"/>
+              </a:spcAft>
+            </a:pPr>
+            <a:r>
+              <a:rPr sz="1000" b="1" i="0" lang="zh-CN" altLang="zh-CN">
                 <a:solidFill>
                   <a:srgbClr val="262626"/>
                 </a:solidFill>
                 <a:latin typeface="Microsoft YaHei"/>
                 <a:ea typeface="Microsoft YaHei"/>
+                <a:cs typeface="Microsoft YaHei"/>
               </a:rPr>
               <a:t>1.6×</a:t>
             </a:r>
@@ -5697,14 +6145,21 @@
               <a:lnSpc>
                 <a:spcPct val="112000"/>
               </a:lnSpc>
-            </a:pPr>
-            <a:r>
-              <a:rPr sz="950" b="0" i="0">
+              <a:spcBef>
+                <a:spcPts val="0"/>
+              </a:spcBef>
+              <a:spcAft>
+                <a:spcPts val="0"/>
+              </a:spcAft>
+            </a:pPr>
+            <a:r>
+              <a:rPr sz="950" b="0" i="0" lang="zh-CN" altLang="zh-CN">
                 <a:solidFill>
                   <a:srgbClr val="595959"/>
                 </a:solidFill>
                 <a:latin typeface="Microsoft YaHei"/>
                 <a:ea typeface="Microsoft YaHei"/>
+                <a:cs typeface="Microsoft YaHei"/>
               </a:rPr>
               <a:t>两要素</a:t>
             </a:r>
@@ -5751,7 +6206,14 @@
           <a:bodyPr rtlCol="0" anchor="ctr"/>
           <a:lstStyle/>
           <a:p>
-            <a:pPr algn="ctr"/>
+            <a:pPr algn="ctr">
+              <a:spcBef>
+                <a:spcPts val="0"/>
+              </a:spcBef>
+              <a:spcAft>
+                <a:spcPts val="0"/>
+              </a:spcAft>
+            </a:pPr>
           </a:p>
         </p:txBody>
       </p:sp>
@@ -5763,8 +6225,8 @@
         </p:nvSpPr>
         <p:spPr>
           <a:xfrm>
-            <a:off x="10300758" y="4462780"/>
-            <a:ext cx="1121833" cy="139700"/>
+            <a:off x="10300758" y="4442396"/>
+            <a:ext cx="1121833" cy="180467"/>
           </a:xfrm>
           <a:prstGeom prst="rect">
             <a:avLst/>
@@ -5781,14 +6243,21 @@
               <a:lnSpc>
                 <a:spcPct val="112000"/>
               </a:lnSpc>
-            </a:pPr>
-            <a:r>
-              <a:rPr sz="1000" b="1" i="0">
+              <a:spcBef>
+                <a:spcPts val="0"/>
+              </a:spcBef>
+              <a:spcAft>
+                <a:spcPts val="0"/>
+              </a:spcAft>
+            </a:pPr>
+            <a:r>
+              <a:rPr sz="1000" b="1" i="0" lang="zh-CN" altLang="zh-CN">
                 <a:solidFill>
                   <a:srgbClr val="262626"/>
                 </a:solidFill>
                 <a:latin typeface="Microsoft YaHei"/>
                 <a:ea typeface="Microsoft YaHei"/>
+                <a:cs typeface="Microsoft YaHei"/>
               </a:rPr>
               <a:t>3.0×</a:t>
             </a:r>
@@ -5821,14 +6290,21 @@
               <a:lnSpc>
                 <a:spcPct val="112000"/>
               </a:lnSpc>
-            </a:pPr>
-            <a:r>
-              <a:rPr sz="950" b="0" i="0">
+              <a:spcBef>
+                <a:spcPts val="0"/>
+              </a:spcBef>
+              <a:spcAft>
+                <a:spcPts val="0"/>
+              </a:spcAft>
+            </a:pPr>
+            <a:r>
+              <a:rPr sz="950" b="0" i="0" lang="zh-CN" altLang="zh-CN">
                 <a:solidFill>
                   <a:srgbClr val="595959"/>
                 </a:solidFill>
                 <a:latin typeface="Microsoft YaHei"/>
                 <a:ea typeface="Microsoft YaHei"/>
+                <a:cs typeface="Microsoft YaHei"/>
               </a:rPr>
               <a:t>三融合</a:t>
             </a:r>
